--- a/lecons/F5/33_F5_M3_L29_Population_Distribution.pptx
+++ b/lecons/F5/33_F5_M3_L29_Population_Distribution.pptx
@@ -13332,7 +13332,7 @@
               <a:buNone/>
             </a:pPr>
             <a:r>
-              <a:rPr lang="en-US" sz="4000" b="1" dirty="0">
+              <a:rPr lang="en-US" sz="3200" b="1" dirty="0">
                 <a:solidFill>
                   <a:srgbClr val="111111"/>
                 </a:solidFill>
@@ -13342,7 +13342,7 @@
               </a:rPr>
               <a:t>Topic: The Dynamics of Population and Implications</a:t>
             </a:r>
-            <a:endParaRPr lang="en-US" sz="4000" dirty="0"/>
+            <a:endParaRPr lang="en-US" sz="3200" dirty="0"/>
           </a:p>
           <a:p>
             <a:pPr algn="l" indent="0" marL="0">
@@ -13352,7 +13352,7 @@
               <a:buNone/>
             </a:pPr>
             <a:r>
-              <a:rPr lang="en-US" sz="4000" b="1" dirty="0">
+              <a:rPr lang="en-US" sz="3200" b="1" dirty="0">
                 <a:solidFill>
                   <a:srgbClr val="111111"/>
                 </a:solidFill>
@@ -13362,7 +13362,7 @@
               </a:rPr>
               <a:t>Sub-topic: Population and Population Distribution</a:t>
             </a:r>
-            <a:endParaRPr lang="en-US" sz="4000" dirty="0"/>
+            <a:endParaRPr lang="en-US" sz="3200" dirty="0"/>
           </a:p>
           <a:p>
             <a:pPr algn="l" indent="0" marL="0">
@@ -13372,7 +13372,7 @@
               <a:buNone/>
             </a:pPr>
             <a:r>
-              <a:rPr lang="en-US" sz="4000" b="1" dirty="0">
+              <a:rPr lang="en-US" sz="3200" b="1" dirty="0">
                 <a:solidFill>
                   <a:srgbClr val="990011"/>
                 </a:solidFill>
@@ -13382,7 +13382,7 @@
               </a:rPr>
               <a:t>Lesson 29: Population Distribution</a:t>
             </a:r>
-            <a:endParaRPr lang="en-US" sz="4000" dirty="0"/>
+            <a:endParaRPr lang="en-US" sz="3200" dirty="0"/>
           </a:p>
         </p:txBody>
       </p:sp>
